--- a/tasks/finalpool/12306-yf-investor-roadshow-excel-ppt-email/groundtruth_workspace/Investor_Roadshow.pptx
+++ b/tasks/finalpool/12306-yf-investor-roadshow-excel-ppt-email/groundtruth_workspace/Investor_Roadshow.pptx
@@ -3094,19 +3094,29 @@
       <p:grpSpPr/>
       <p:sp>
         <p:nvSpPr>
-          <p:cNvPr id="2" name="Title 1"/>
-          <p:cNvSpPr>
-            <a:spLocks noGrp="1"/>
-          </p:cNvSpPr>
-          <p:nvPr>
-            <p:ph type="ctrTitle"/>
-          </p:nvPr>
-        </p:nvSpPr>
-        <p:spPr/>
-        <p:txBody>
-          <a:bodyPr/>
-          <a:lstStyle/>
-          <a:p>
+          <p:cNvPr id="2" name="TextBox 1"/>
+          <p:cNvSpPr txBox="1"/>
+          <p:nvPr/>
+        </p:nvSpPr>
+        <p:spPr>
+          <a:xfrm>
+            <a:off x="457200" y="365760"/>
+            <a:ext cx="8229600" cy="731520"/>
+          </a:xfrm>
+          <a:prstGeom prst="rect">
+            <a:avLst/>
+          </a:prstGeom>
+          <a:noFill/>
+        </p:spPr>
+        <p:txBody>
+          <a:bodyPr wrap="none">
+            <a:spAutoFit/>
+          </a:bodyPr>
+          <a:lstStyle/>
+          <a:p>
+            <a:pPr>
+              <a:defRPr sz="3200" b="1"/>
+            </a:pPr>
             <a:r>
               <a:t>Q1 2026 Investor Roadshow</a:t>
             </a:r>
@@ -3115,19 +3125,29 @@
       </p:sp>
       <p:sp>
         <p:nvSpPr>
-          <p:cNvPr id="3" name="Subtitle 2"/>
-          <p:cNvSpPr>
-            <a:spLocks noGrp="1"/>
-          </p:cNvSpPr>
-          <p:nvPr>
-            <p:ph type="subTitle" idx="1"/>
-          </p:nvPr>
-        </p:nvSpPr>
-        <p:spPr/>
-        <p:txBody>
-          <a:bodyPr/>
-          <a:lstStyle/>
-          <a:p>
+          <p:cNvPr id="3" name="TextBox 2"/>
+          <p:cNvSpPr txBox="1"/>
+          <p:nvPr/>
+        </p:nvSpPr>
+        <p:spPr>
+          <a:xfrm>
+            <a:off x="640080" y="1463040"/>
+            <a:ext cx="7863840" cy="4572000"/>
+          </a:xfrm>
+          <a:prstGeom prst="rect">
+            <a:avLst/>
+          </a:prstGeom>
+          <a:noFill/>
+        </p:spPr>
+        <p:txBody>
+          <a:bodyPr wrap="none">
+            <a:spAutoFit/>
+          </a:bodyPr>
+          <a:lstStyle/>
+          <a:p>
+            <a:pPr>
+              <a:defRPr sz="1800"/>
+            </a:pPr>
             <a:r>
               <a:t>City Tour Schedule: Shanghai &amp; Guangzhou</a:t>
             </a:r>
@@ -3154,19 +3174,29 @@
       <p:grpSpPr/>
       <p:sp>
         <p:nvSpPr>
-          <p:cNvPr id="2" name="Title 1"/>
-          <p:cNvSpPr>
-            <a:spLocks noGrp="1"/>
-          </p:cNvSpPr>
-          <p:nvPr>
-            <p:ph type="title"/>
-          </p:nvPr>
-        </p:nvSpPr>
-        <p:spPr/>
-        <p:txBody>
-          <a:bodyPr/>
-          <a:lstStyle/>
-          <a:p>
+          <p:cNvPr id="2" name="TextBox 1"/>
+          <p:cNvSpPr txBox="1"/>
+          <p:nvPr/>
+        </p:nvSpPr>
+        <p:spPr>
+          <a:xfrm>
+            <a:off x="457200" y="365760"/>
+            <a:ext cx="8229600" cy="731520"/>
+          </a:xfrm>
+          <a:prstGeom prst="rect">
+            <a:avLst/>
+          </a:prstGeom>
+          <a:noFill/>
+        </p:spPr>
+        <p:txBody>
+          <a:bodyPr wrap="none">
+            <a:spAutoFit/>
+          </a:bodyPr>
+          <a:lstStyle/>
+          <a:p>
+            <a:pPr>
+              <a:defRPr sz="3200" b="1"/>
+            </a:pPr>
             <a:r>
               <a:t>Travel Itinerary</a:t>
             </a:r>
@@ -3175,26 +3205,39 @@
       </p:sp>
       <p:sp>
         <p:nvSpPr>
-          <p:cNvPr id="3" name="Content Placeholder 2"/>
-          <p:cNvSpPr>
-            <a:spLocks noGrp="1"/>
-          </p:cNvSpPr>
-          <p:nvPr>
-            <p:ph idx="1"/>
-          </p:nvPr>
-        </p:nvSpPr>
-        <p:spPr/>
-        <p:txBody>
-          <a:bodyPr/>
-          <a:lstStyle/>
-          <a:p>
-            <a:r>
-              <a:t>Shanghai: G11 | 07:00→12:31 | Business ¥1748</a:t>
-            </a:r>
-          </a:p>
-          <a:p>
-            <a:r>
-              <a:t>Guangzhou: G105 | 08:00→15:48 | Business ¥2631</a:t>
+          <p:cNvPr id="3" name="TextBox 2"/>
+          <p:cNvSpPr txBox="1"/>
+          <p:nvPr/>
+        </p:nvSpPr>
+        <p:spPr>
+          <a:xfrm>
+            <a:off x="640080" y="1463040"/>
+            <a:ext cx="7863840" cy="4572000"/>
+          </a:xfrm>
+          <a:prstGeom prst="rect">
+            <a:avLst/>
+          </a:prstGeom>
+          <a:noFill/>
+        </p:spPr>
+        <p:txBody>
+          <a:bodyPr wrap="none">
+            <a:spAutoFit/>
+          </a:bodyPr>
+          <a:lstStyle/>
+          <a:p>
+            <a:pPr>
+              <a:defRPr sz="1800"/>
+            </a:pPr>
+            <a:r>
+              <a:t>Shanghai: G11 | 07:00-&gt;12:31 | Business class | CNY 1748</a:t>
+            </a:r>
+          </a:p>
+          <a:p>
+            <a:pPr>
+              <a:defRPr sz="1800"/>
+            </a:pPr>
+            <a:r>
+              <a:t>Guangzhou: G105 | 08:00-&gt;15:48 | Business class | CNY 2631</a:t>
             </a:r>
           </a:p>
         </p:txBody>
@@ -3219,42 +3262,70 @@
       <p:grpSpPr/>
       <p:sp>
         <p:nvSpPr>
-          <p:cNvPr id="2" name="Title 1"/>
-          <p:cNvSpPr>
-            <a:spLocks noGrp="1"/>
-          </p:cNvSpPr>
-          <p:nvPr>
-            <p:ph type="title"/>
-          </p:nvPr>
-        </p:nvSpPr>
-        <p:spPr/>
-        <p:txBody>
-          <a:bodyPr/>
-          <a:lstStyle/>
-          <a:p>
-            <a:r>
-              <a:t>Financial Highlights - AAPL</a:t>
-            </a:r>
-          </a:p>
-        </p:txBody>
-      </p:sp>
-      <p:sp>
-        <p:nvSpPr>
-          <p:cNvPr id="3" name="Content Placeholder 2"/>
-          <p:cNvSpPr>
-            <a:spLocks noGrp="1"/>
-          </p:cNvSpPr>
-          <p:nvPr>
-            <p:ph idx="1"/>
-          </p:nvPr>
-        </p:nvSpPr>
-        <p:spPr/>
-        <p:txBody>
-          <a:bodyPr/>
-          <a:lstStyle/>
-          <a:p>
-            <a:r>
-              <a:t>Revenue FY2023: $394.3B | Net Income: $99.8B | EPS: $6.16</a:t>
+          <p:cNvPr id="2" name="TextBox 1"/>
+          <p:cNvSpPr txBox="1"/>
+          <p:nvPr/>
+        </p:nvSpPr>
+        <p:spPr>
+          <a:xfrm>
+            <a:off x="457200" y="365760"/>
+            <a:ext cx="8229600" cy="731520"/>
+          </a:xfrm>
+          <a:prstGeom prst="rect">
+            <a:avLst/>
+          </a:prstGeom>
+          <a:noFill/>
+        </p:spPr>
+        <p:txBody>
+          <a:bodyPr wrap="none">
+            <a:spAutoFit/>
+          </a:bodyPr>
+          <a:lstStyle/>
+          <a:p>
+            <a:pPr>
+              <a:defRPr sz="3200" b="1"/>
+            </a:pPr>
+            <a:r>
+              <a:t>Financial Highlights - GOOGL</a:t>
+            </a:r>
+          </a:p>
+        </p:txBody>
+      </p:sp>
+      <p:sp>
+        <p:nvSpPr>
+          <p:cNvPr id="3" name="TextBox 2"/>
+          <p:cNvSpPr txBox="1"/>
+          <p:nvPr/>
+        </p:nvSpPr>
+        <p:spPr>
+          <a:xfrm>
+            <a:off x="640080" y="1463040"/>
+            <a:ext cx="7863840" cy="4572000"/>
+          </a:xfrm>
+          <a:prstGeom prst="rect">
+            <a:avLst/>
+          </a:prstGeom>
+          <a:noFill/>
+        </p:spPr>
+        <p:txBody>
+          <a:bodyPr wrap="none">
+            <a:spAutoFit/>
+          </a:bodyPr>
+          <a:lstStyle/>
+          <a:p>
+            <a:pPr>
+              <a:defRPr sz="1800"/>
+            </a:pPr>
+            <a:r>
+              <a:t>Revenue FY2025: $402.8B | Net Income: $132.2B | EPS: $10.82</a:t>
+            </a:r>
+          </a:p>
+          <a:p>
+            <a:pPr>
+              <a:defRPr sz="1800"/>
+            </a:pPr>
+            <a:r>
+              <a:t>Revenue FY2024: $350.0B | Net Income: $100.1B</a:t>
             </a:r>
           </a:p>
         </p:txBody>
@@ -3279,42 +3350,70 @@
       <p:grpSpPr/>
       <p:sp>
         <p:nvSpPr>
-          <p:cNvPr id="2" name="Title 1"/>
-          <p:cNvSpPr>
-            <a:spLocks noGrp="1"/>
-          </p:cNvSpPr>
-          <p:nvPr>
-            <p:ph type="title"/>
-          </p:nvPr>
-        </p:nvSpPr>
-        <p:spPr/>
-        <p:txBody>
-          <a:bodyPr/>
-          <a:lstStyle/>
-          <a:p>
-            <a:r>
-              <a:t>Stock Performance: AAPL vs MSFT</a:t>
-            </a:r>
-          </a:p>
-        </p:txBody>
-      </p:sp>
-      <p:sp>
-        <p:nvSpPr>
-          <p:cNvPr id="3" name="Content Placeholder 2"/>
-          <p:cNvSpPr>
-            <a:spLocks noGrp="1"/>
-          </p:cNvSpPr>
-          <p:nvPr>
-            <p:ph idx="1"/>
-          </p:nvPr>
-        </p:nvSpPr>
-        <p:spPr/>
-        <p:txBody>
-          <a:bodyPr/>
-          <a:lstStyle/>
-          <a:p>
-            <a:r>
-              <a:t>AAPL 30d: -2.3% | MSFT 30d: +3.1%</a:t>
+          <p:cNvPr id="2" name="TextBox 1"/>
+          <p:cNvSpPr txBox="1"/>
+          <p:nvPr/>
+        </p:nvSpPr>
+        <p:spPr>
+          <a:xfrm>
+            <a:off x="457200" y="365760"/>
+            <a:ext cx="8229600" cy="731520"/>
+          </a:xfrm>
+          <a:prstGeom prst="rect">
+            <a:avLst/>
+          </a:prstGeom>
+          <a:noFill/>
+        </p:spPr>
+        <p:txBody>
+          <a:bodyPr wrap="none">
+            <a:spAutoFit/>
+          </a:bodyPr>
+          <a:lstStyle/>
+          <a:p>
+            <a:pPr>
+              <a:defRPr sz="3200" b="1"/>
+            </a:pPr>
+            <a:r>
+              <a:t>Stock Performance: GOOGL vs AMZN</a:t>
+            </a:r>
+          </a:p>
+        </p:txBody>
+      </p:sp>
+      <p:sp>
+        <p:nvSpPr>
+          <p:cNvPr id="3" name="TextBox 2"/>
+          <p:cNvSpPr txBox="1"/>
+          <p:nvPr/>
+        </p:nvSpPr>
+        <p:spPr>
+          <a:xfrm>
+            <a:off x="640080" y="1463040"/>
+            <a:ext cx="7863840" cy="4572000"/>
+          </a:xfrm>
+          <a:prstGeom prst="rect">
+            <a:avLst/>
+          </a:prstGeom>
+          <a:noFill/>
+        </p:spPr>
+        <p:txBody>
+          <a:bodyPr wrap="none">
+            <a:spAutoFit/>
+          </a:bodyPr>
+          <a:lstStyle/>
+          <a:p>
+            <a:pPr>
+              <a:defRPr sz="1800"/>
+            </a:pPr>
+            <a:r>
+              <a:t>GOOGL 30d change: -11.4% | Current price: $300.88</a:t>
+            </a:r>
+          </a:p>
+          <a:p>
+            <a:pPr>
+              <a:defRPr sz="1800"/>
+            </a:pPr>
+            <a:r>
+              <a:t>AMZN 30d change: -8.3% | Current price: $218.94</a:t>
             </a:r>
           </a:p>
         </p:txBody>
@@ -3339,19 +3438,29 @@
       <p:grpSpPr/>
       <p:sp>
         <p:nvSpPr>
-          <p:cNvPr id="2" name="Title 1"/>
-          <p:cNvSpPr>
-            <a:spLocks noGrp="1"/>
-          </p:cNvSpPr>
-          <p:nvPr>
-            <p:ph type="title"/>
-          </p:nvPr>
-        </p:nvSpPr>
-        <p:spPr/>
-        <p:txBody>
-          <a:bodyPr/>
-          <a:lstStyle/>
-          <a:p>
+          <p:cNvPr id="2" name="TextBox 1"/>
+          <p:cNvSpPr txBox="1"/>
+          <p:nvPr/>
+        </p:nvSpPr>
+        <p:spPr>
+          <a:xfrm>
+            <a:off x="457200" y="365760"/>
+            <a:ext cx="8229600" cy="731520"/>
+          </a:xfrm>
+          <a:prstGeom prst="rect">
+            <a:avLst/>
+          </a:prstGeom>
+          <a:noFill/>
+        </p:spPr>
+        <p:txBody>
+          <a:bodyPr wrap="none">
+            <a:spAutoFit/>
+          </a:bodyPr>
+          <a:lstStyle/>
+          <a:p>
+            <a:pPr>
+              <a:defRPr sz="3200" b="1"/>
+            </a:pPr>
             <a:r>
               <a:t>Analyst Recommendations</a:t>
             </a:r>
@@ -3360,21 +3469,39 @@
       </p:sp>
       <p:sp>
         <p:nvSpPr>
-          <p:cNvPr id="3" name="Content Placeholder 2"/>
-          <p:cNvSpPr>
-            <a:spLocks noGrp="1"/>
-          </p:cNvSpPr>
-          <p:nvPr>
-            <p:ph idx="1"/>
-          </p:nvPr>
-        </p:nvSpPr>
-        <p:spPr/>
-        <p:txBody>
-          <a:bodyPr/>
-          <a:lstStyle/>
-          <a:p>
-            <a:r>
-              <a:t>AAPL: BUY consensus | MSFT: BUY consensus</a:t>
+          <p:cNvPr id="3" name="TextBox 2"/>
+          <p:cNvSpPr txBox="1"/>
+          <p:nvPr/>
+        </p:nvSpPr>
+        <p:spPr>
+          <a:xfrm>
+            <a:off x="640080" y="1463040"/>
+            <a:ext cx="7863840" cy="4572000"/>
+          </a:xfrm>
+          <a:prstGeom prst="rect">
+            <a:avLst/>
+          </a:prstGeom>
+          <a:noFill/>
+        </p:spPr>
+        <p:txBody>
+          <a:bodyPr wrap="none">
+            <a:spAutoFit/>
+          </a:bodyPr>
+          <a:lstStyle/>
+          <a:p>
+            <a:pPr>
+              <a:defRPr sz="1800"/>
+            </a:pPr>
+            <a:r>
+              <a:t>GOOGL: BUY consensus</a:t>
+            </a:r>
+          </a:p>
+          <a:p>
+            <a:pPr>
+              <a:defRPr sz="1800"/>
+            </a:pPr>
+            <a:r>
+              <a:t>AMZN: BUY consensus</a:t>
             </a:r>
           </a:p>
         </p:txBody>
